--- a/REI-Combinatoria/Materiales en inglés/08b - Fase3_InformeGrupal (pendent de revisió).pptx
+++ b/REI-Combinatoria/Materiales en inglés/08b - Fase3_InformeGrupal (pendent de revisió).pptx
@@ -290,7 +290,7 @@
 <file path=ppt/revisionInfo.xml><?xml version="1.0" encoding="utf-8"?>
 <p1510:revInfo xmlns:a="http://schemas.openxmlformats.org/drawingml/2006/main" xmlns:r="http://schemas.openxmlformats.org/officeDocument/2006/relationships" xmlns:p1510="http://schemas.microsoft.com/office/powerpoint/2015/10/main">
   <p1510:revLst>
-    <p1510:client id="{7C6D53C4-A734-4D7D-8378-8004A93D69CB}" v="22" dt="2025-01-18T14:23:54.109"/>
+    <p1510:client id="{3BA27033-0617-49A6-9DB4-3A0219AB59DB}" v="1" dt="2025-10-16T17:42:57.564"/>
   </p1510:revLst>
 </p1510:revInfo>
 </file>
@@ -310,22 +310,6 @@
           <pc:docMk/>
           <pc:sldMk cId="0" sldId="256"/>
         </pc:sldMkLst>
-        <pc:spChg chg="mod">
-          <ac:chgData name="Susana Vásquez" userId="dffc548e-2323-4ffc-a8aa-757e426c1faa" providerId="ADAL" clId="{7C6D53C4-A734-4D7D-8378-8004A93D69CB}" dt="2025-01-18T08:04:41.913" v="829" actId="790"/>
-          <ac:spMkLst>
-            <pc:docMk/>
-            <pc:sldMk cId="0" sldId="256"/>
-            <ac:spMk id="75" creationId="{00000000-0000-0000-0000-000000000000}"/>
-          </ac:spMkLst>
-        </pc:spChg>
-        <pc:spChg chg="mod">
-          <ac:chgData name="Susana Vásquez" userId="dffc548e-2323-4ffc-a8aa-757e426c1faa" providerId="ADAL" clId="{7C6D53C4-A734-4D7D-8378-8004A93D69CB}" dt="2025-01-18T08:04:41.913" v="829" actId="790"/>
-          <ac:spMkLst>
-            <pc:docMk/>
-            <pc:sldMk cId="0" sldId="256"/>
-            <ac:spMk id="77" creationId="{00000000-0000-0000-0000-000000000000}"/>
-          </ac:spMkLst>
-        </pc:spChg>
       </pc:sldChg>
       <pc:sldChg chg="addSp delSp modSp mod">
         <pc:chgData name="Susana Vásquez" userId="dffc548e-2323-4ffc-a8aa-757e426c1faa" providerId="ADAL" clId="{7C6D53C4-A734-4D7D-8378-8004A93D69CB}" dt="2025-01-18T08:33:44.642" v="1583" actId="1076"/>
@@ -333,78 +317,6 @@
           <pc:docMk/>
           <pc:sldMk cId="0" sldId="257"/>
         </pc:sldMkLst>
-        <pc:spChg chg="add del mod">
-          <ac:chgData name="Susana Vásquez" userId="dffc548e-2323-4ffc-a8aa-757e426c1faa" providerId="ADAL" clId="{7C6D53C4-A734-4D7D-8378-8004A93D69CB}" dt="2025-01-18T07:56:29.761" v="175" actId="478"/>
-          <ac:spMkLst>
-            <pc:docMk/>
-            <pc:sldMk cId="0" sldId="257"/>
-            <ac:spMk id="3" creationId="{CEE073A3-7ECD-6540-6224-0F0CE4571F8E}"/>
-          </ac:spMkLst>
-        </pc:spChg>
-        <pc:spChg chg="add mod">
-          <ac:chgData name="Susana Vásquez" userId="dffc548e-2323-4ffc-a8aa-757e426c1faa" providerId="ADAL" clId="{7C6D53C4-A734-4D7D-8378-8004A93D69CB}" dt="2025-01-18T07:56:29.066" v="174"/>
-          <ac:spMkLst>
-            <pc:docMk/>
-            <pc:sldMk cId="0" sldId="257"/>
-            <ac:spMk id="5" creationId="{19BB2ABA-9D19-104A-D37E-6792A24E1029}"/>
-          </ac:spMkLst>
-        </pc:spChg>
-        <pc:spChg chg="add del mod">
-          <ac:chgData name="Susana Vásquez" userId="dffc548e-2323-4ffc-a8aa-757e426c1faa" providerId="ADAL" clId="{7C6D53C4-A734-4D7D-8378-8004A93D69CB}" dt="2025-01-18T07:56:37.329" v="177" actId="478"/>
-          <ac:spMkLst>
-            <pc:docMk/>
-            <pc:sldMk cId="0" sldId="257"/>
-            <ac:spMk id="7" creationId="{3DEF95A7-9E23-A69F-625B-53C0B839CA5A}"/>
-          </ac:spMkLst>
-        </pc:spChg>
-        <pc:spChg chg="add mod">
-          <ac:chgData name="Susana Vásquez" userId="dffc548e-2323-4ffc-a8aa-757e426c1faa" providerId="ADAL" clId="{7C6D53C4-A734-4D7D-8378-8004A93D69CB}" dt="2025-01-18T08:04:41.913" v="829" actId="790"/>
-          <ac:spMkLst>
-            <pc:docMk/>
-            <pc:sldMk cId="0" sldId="257"/>
-            <ac:spMk id="10" creationId="{F36B3DF0-784E-5B60-D48D-E8A811ACA6AC}"/>
-          </ac:spMkLst>
-        </pc:spChg>
-        <pc:spChg chg="add del mod">
-          <ac:chgData name="Susana Vásquez" userId="dffc548e-2323-4ffc-a8aa-757e426c1faa" providerId="ADAL" clId="{7C6D53C4-A734-4D7D-8378-8004A93D69CB}" dt="2025-01-18T07:56:33.326" v="176" actId="478"/>
-          <ac:spMkLst>
-            <pc:docMk/>
-            <pc:sldMk cId="0" sldId="257"/>
-            <ac:spMk id="82" creationId="{00000000-0000-0000-0000-000000000000}"/>
-          </ac:spMkLst>
-        </pc:spChg>
-        <pc:spChg chg="mod">
-          <ac:chgData name="Susana Vásquez" userId="dffc548e-2323-4ffc-a8aa-757e426c1faa" providerId="ADAL" clId="{7C6D53C4-A734-4D7D-8378-8004A93D69CB}" dt="2025-01-18T08:04:41.913" v="829" actId="790"/>
-          <ac:spMkLst>
-            <pc:docMk/>
-            <pc:sldMk cId="0" sldId="257"/>
-            <ac:spMk id="83" creationId="{00000000-0000-0000-0000-000000000000}"/>
-          </ac:spMkLst>
-        </pc:spChg>
-        <pc:graphicFrameChg chg="add mod">
-          <ac:chgData name="Susana Vásquez" userId="dffc548e-2323-4ffc-a8aa-757e426c1faa" providerId="ADAL" clId="{7C6D53C4-A734-4D7D-8378-8004A93D69CB}" dt="2025-01-18T07:56:25.902" v="173"/>
-          <ac:graphicFrameMkLst>
-            <pc:docMk/>
-            <pc:sldMk cId="0" sldId="257"/>
-            <ac:graphicFrameMk id="4" creationId="{367F6590-447E-00FE-68E8-B3C93FE60D66}"/>
-          </ac:graphicFrameMkLst>
-        </pc:graphicFrameChg>
-        <pc:graphicFrameChg chg="add mod modGraphic">
-          <ac:chgData name="Susana Vásquez" userId="dffc548e-2323-4ffc-a8aa-757e426c1faa" providerId="ADAL" clId="{7C6D53C4-A734-4D7D-8378-8004A93D69CB}" dt="2025-01-18T08:33:44.642" v="1583" actId="1076"/>
-          <ac:graphicFrameMkLst>
-            <pc:docMk/>
-            <pc:sldMk cId="0" sldId="257"/>
-            <ac:graphicFrameMk id="8" creationId="{BB35C86F-270B-0E50-0425-47B7F2755A73}"/>
-          </ac:graphicFrameMkLst>
-        </pc:graphicFrameChg>
-        <pc:graphicFrameChg chg="add mod modGraphic">
-          <ac:chgData name="Susana Vásquez" userId="dffc548e-2323-4ffc-a8aa-757e426c1faa" providerId="ADAL" clId="{7C6D53C4-A734-4D7D-8378-8004A93D69CB}" dt="2025-01-18T08:33:42.118" v="1582" actId="20577"/>
-          <ac:graphicFrameMkLst>
-            <pc:docMk/>
-            <pc:sldMk cId="0" sldId="257"/>
-            <ac:graphicFrameMk id="9" creationId="{AF89C356-D1CD-6E82-CCDF-CEEA09F288D1}"/>
-          </ac:graphicFrameMkLst>
-        </pc:graphicFrameChg>
       </pc:sldChg>
       <pc:sldChg chg="addSp delSp modSp mod">
         <pc:chgData name="Susana Vásquez" userId="dffc548e-2323-4ffc-a8aa-757e426c1faa" providerId="ADAL" clId="{7C6D53C4-A734-4D7D-8378-8004A93D69CB}" dt="2025-01-18T14:33:05.270" v="2206"/>
@@ -412,46 +324,6 @@
           <pc:docMk/>
           <pc:sldMk cId="0" sldId="258"/>
         </pc:sldMkLst>
-        <pc:spChg chg="add del mod">
-          <ac:chgData name="Susana Vásquez" userId="dffc548e-2323-4ffc-a8aa-757e426c1faa" providerId="ADAL" clId="{7C6D53C4-A734-4D7D-8378-8004A93D69CB}" dt="2025-01-18T08:10:25.858" v="1238" actId="478"/>
-          <ac:spMkLst>
-            <pc:docMk/>
-            <pc:sldMk cId="0" sldId="258"/>
-            <ac:spMk id="3" creationId="{85F66362-1806-31DC-6116-C911248D8E7D}"/>
-          </ac:spMkLst>
-        </pc:spChg>
-        <pc:spChg chg="add del mod">
-          <ac:chgData name="Susana Vásquez" userId="dffc548e-2323-4ffc-a8aa-757e426c1faa" providerId="ADAL" clId="{7C6D53C4-A734-4D7D-8378-8004A93D69CB}" dt="2025-01-18T08:10:27.010" v="1239" actId="478"/>
-          <ac:spMkLst>
-            <pc:docMk/>
-            <pc:sldMk cId="0" sldId="258"/>
-            <ac:spMk id="4" creationId="{FCEEF390-2A1E-D9E2-EB5A-F615BDAB11F2}"/>
-          </ac:spMkLst>
-        </pc:spChg>
-        <pc:spChg chg="add mod">
-          <ac:chgData name="Susana Vásquez" userId="dffc548e-2323-4ffc-a8aa-757e426c1faa" providerId="ADAL" clId="{7C6D53C4-A734-4D7D-8378-8004A93D69CB}" dt="2025-01-18T08:10:27.699" v="1240"/>
-          <ac:spMkLst>
-            <pc:docMk/>
-            <pc:sldMk cId="0" sldId="258"/>
-            <ac:spMk id="5" creationId="{2B49691F-9A32-BE60-D823-CD318123B1A2}"/>
-          </ac:spMkLst>
-        </pc:spChg>
-        <pc:spChg chg="mod">
-          <ac:chgData name="Susana Vásquez" userId="dffc548e-2323-4ffc-a8aa-757e426c1faa" providerId="ADAL" clId="{7C6D53C4-A734-4D7D-8378-8004A93D69CB}" dt="2025-01-18T14:33:05.270" v="2206"/>
-          <ac:spMkLst>
-            <pc:docMk/>
-            <pc:sldMk cId="0" sldId="258"/>
-            <ac:spMk id="88" creationId="{00000000-0000-0000-0000-000000000000}"/>
-          </ac:spMkLst>
-        </pc:spChg>
-        <pc:spChg chg="del mod">
-          <ac:chgData name="Susana Vásquez" userId="dffc548e-2323-4ffc-a8aa-757e426c1faa" providerId="ADAL" clId="{7C6D53C4-A734-4D7D-8378-8004A93D69CB}" dt="2025-01-18T08:10:23.452" v="1236" actId="478"/>
-          <ac:spMkLst>
-            <pc:docMk/>
-            <pc:sldMk cId="0" sldId="258"/>
-            <ac:spMk id="89" creationId="{00000000-0000-0000-0000-000000000000}"/>
-          </ac:spMkLst>
-        </pc:spChg>
       </pc:sldChg>
       <pc:sldChg chg="modSp del mod">
         <pc:chgData name="Susana Vásquez" userId="dffc548e-2323-4ffc-a8aa-757e426c1faa" providerId="ADAL" clId="{7C6D53C4-A734-4D7D-8378-8004A93D69CB}" dt="2025-01-18T08:06:41.261" v="993" actId="47"/>
@@ -459,22 +331,6 @@
           <pc:docMk/>
           <pc:sldMk cId="0" sldId="259"/>
         </pc:sldMkLst>
-        <pc:spChg chg="mod">
-          <ac:chgData name="Susana Vásquez" userId="dffc548e-2323-4ffc-a8aa-757e426c1faa" providerId="ADAL" clId="{7C6D53C4-A734-4D7D-8378-8004A93D69CB}" dt="2025-01-18T08:04:41.913" v="829" actId="790"/>
-          <ac:spMkLst>
-            <pc:docMk/>
-            <pc:sldMk cId="0" sldId="259"/>
-            <ac:spMk id="94" creationId="{00000000-0000-0000-0000-000000000000}"/>
-          </ac:spMkLst>
-        </pc:spChg>
-        <pc:spChg chg="mod">
-          <ac:chgData name="Susana Vásquez" userId="dffc548e-2323-4ffc-a8aa-757e426c1faa" providerId="ADAL" clId="{7C6D53C4-A734-4D7D-8378-8004A93D69CB}" dt="2025-01-18T08:04:41.913" v="829" actId="790"/>
-          <ac:spMkLst>
-            <pc:docMk/>
-            <pc:sldMk cId="0" sldId="259"/>
-            <ac:spMk id="95" creationId="{00000000-0000-0000-0000-000000000000}"/>
-          </ac:spMkLst>
-        </pc:spChg>
       </pc:sldChg>
       <pc:sldChg chg="addSp delSp modSp add mod">
         <pc:chgData name="Susana Vásquez" userId="dffc548e-2323-4ffc-a8aa-757e426c1faa" providerId="ADAL" clId="{7C6D53C4-A734-4D7D-8378-8004A93D69CB}" dt="2025-01-18T14:25:36.721" v="2180" actId="20577"/>
@@ -482,46 +338,6 @@
           <pc:docMk/>
           <pc:sldMk cId="1679887425" sldId="259"/>
         </pc:sldMkLst>
-        <pc:spChg chg="add del mod">
-          <ac:chgData name="Susana Vásquez" userId="dffc548e-2323-4ffc-a8aa-757e426c1faa" providerId="ADAL" clId="{7C6D53C4-A734-4D7D-8378-8004A93D69CB}" dt="2025-01-18T08:10:32.145" v="1242" actId="478"/>
-          <ac:spMkLst>
-            <pc:docMk/>
-            <pc:sldMk cId="1679887425" sldId="259"/>
-            <ac:spMk id="3" creationId="{6CDCFB4C-0C3A-9C64-283F-3E93642F7173}"/>
-          </ac:spMkLst>
-        </pc:spChg>
-        <pc:spChg chg="add mod">
-          <ac:chgData name="Susana Vásquez" userId="dffc548e-2323-4ffc-a8aa-757e426c1faa" providerId="ADAL" clId="{7C6D53C4-A734-4D7D-8378-8004A93D69CB}" dt="2025-01-18T08:10:32.940" v="1243"/>
-          <ac:spMkLst>
-            <pc:docMk/>
-            <pc:sldMk cId="1679887425" sldId="259"/>
-            <ac:spMk id="4" creationId="{E67EEDC2-BF1D-9F75-4C28-21A608E3205F}"/>
-          </ac:spMkLst>
-        </pc:spChg>
-        <pc:spChg chg="mod">
-          <ac:chgData name="Susana Vásquez" userId="dffc548e-2323-4ffc-a8aa-757e426c1faa" providerId="ADAL" clId="{7C6D53C4-A734-4D7D-8378-8004A93D69CB}" dt="2025-01-18T14:25:12.015" v="2159" actId="6549"/>
-          <ac:spMkLst>
-            <pc:docMk/>
-            <pc:sldMk cId="1679887425" sldId="259"/>
-            <ac:spMk id="88" creationId="{67677395-927A-44FB-242D-F55D4A890FB2}"/>
-          </ac:spMkLst>
-        </pc:spChg>
-        <pc:spChg chg="del">
-          <ac:chgData name="Susana Vásquez" userId="dffc548e-2323-4ffc-a8aa-757e426c1faa" providerId="ADAL" clId="{7C6D53C4-A734-4D7D-8378-8004A93D69CB}" dt="2025-01-18T08:10:31.096" v="1241" actId="478"/>
-          <ac:spMkLst>
-            <pc:docMk/>
-            <pc:sldMk cId="1679887425" sldId="259"/>
-            <ac:spMk id="89" creationId="{AA35798E-28AE-6EED-F80B-C0F636737990}"/>
-          </ac:spMkLst>
-        </pc:spChg>
-        <pc:graphicFrameChg chg="add mod modGraphic">
-          <ac:chgData name="Susana Vásquez" userId="dffc548e-2323-4ffc-a8aa-757e426c1faa" providerId="ADAL" clId="{7C6D53C4-A734-4D7D-8378-8004A93D69CB}" dt="2025-01-18T14:25:36.721" v="2180" actId="20577"/>
-          <ac:graphicFrameMkLst>
-            <pc:docMk/>
-            <pc:sldMk cId="1679887425" sldId="259"/>
-            <ac:graphicFrameMk id="5" creationId="{CF1B21DF-C0E5-6258-F521-27CC84722D4D}"/>
-          </ac:graphicFrameMkLst>
-        </pc:graphicFrameChg>
       </pc:sldChg>
       <pc:sldChg chg="modSp del mod">
         <pc:chgData name="Susana Vásquez" userId="dffc548e-2323-4ffc-a8aa-757e426c1faa" providerId="ADAL" clId="{7C6D53C4-A734-4D7D-8378-8004A93D69CB}" dt="2025-01-18T08:06:41.261" v="993" actId="47"/>
@@ -529,22 +345,6 @@
           <pc:docMk/>
           <pc:sldMk cId="0" sldId="260"/>
         </pc:sldMkLst>
-        <pc:spChg chg="mod">
-          <ac:chgData name="Susana Vásquez" userId="dffc548e-2323-4ffc-a8aa-757e426c1faa" providerId="ADAL" clId="{7C6D53C4-A734-4D7D-8378-8004A93D69CB}" dt="2025-01-18T08:04:41.913" v="829" actId="790"/>
-          <ac:spMkLst>
-            <pc:docMk/>
-            <pc:sldMk cId="0" sldId="260"/>
-            <ac:spMk id="100" creationId="{00000000-0000-0000-0000-000000000000}"/>
-          </ac:spMkLst>
-        </pc:spChg>
-        <pc:spChg chg="mod">
-          <ac:chgData name="Susana Vásquez" userId="dffc548e-2323-4ffc-a8aa-757e426c1faa" providerId="ADAL" clId="{7C6D53C4-A734-4D7D-8378-8004A93D69CB}" dt="2025-01-18T08:04:41.913" v="829" actId="790"/>
-          <ac:spMkLst>
-            <pc:docMk/>
-            <pc:sldMk cId="0" sldId="260"/>
-            <ac:spMk id="101" creationId="{00000000-0000-0000-0000-000000000000}"/>
-          </ac:spMkLst>
-        </pc:spChg>
       </pc:sldChg>
       <pc:sldChg chg="addSp delSp modSp add mod">
         <pc:chgData name="Susana Vásquez" userId="dffc548e-2323-4ffc-a8aa-757e426c1faa" providerId="ADAL" clId="{7C6D53C4-A734-4D7D-8378-8004A93D69CB}" dt="2025-01-18T08:41:29.284" v="1730" actId="14100"/>
@@ -552,54 +352,6 @@
           <pc:docMk/>
           <pc:sldMk cId="1139963010" sldId="260"/>
         </pc:sldMkLst>
-        <pc:spChg chg="add del mod">
-          <ac:chgData name="Susana Vásquez" userId="dffc548e-2323-4ffc-a8aa-757e426c1faa" providerId="ADAL" clId="{7C6D53C4-A734-4D7D-8378-8004A93D69CB}" dt="2025-01-18T08:10:36.034" v="1245" actId="478"/>
-          <ac:spMkLst>
-            <pc:docMk/>
-            <pc:sldMk cId="1139963010" sldId="260"/>
-            <ac:spMk id="3" creationId="{3F7C240F-5F92-D5E3-DE74-265ACB9B0566}"/>
-          </ac:spMkLst>
-        </pc:spChg>
-        <pc:spChg chg="add mod">
-          <ac:chgData name="Susana Vásquez" userId="dffc548e-2323-4ffc-a8aa-757e426c1faa" providerId="ADAL" clId="{7C6D53C4-A734-4D7D-8378-8004A93D69CB}" dt="2025-01-18T08:10:36.800" v="1246"/>
-          <ac:spMkLst>
-            <pc:docMk/>
-            <pc:sldMk cId="1139963010" sldId="260"/>
-            <ac:spMk id="4" creationId="{709AA1A1-99CA-CF15-6FE6-B3339CD8406E}"/>
-          </ac:spMkLst>
-        </pc:spChg>
-        <pc:spChg chg="mod">
-          <ac:chgData name="Susana Vásquez" userId="dffc548e-2323-4ffc-a8aa-757e426c1faa" providerId="ADAL" clId="{7C6D53C4-A734-4D7D-8378-8004A93D69CB}" dt="2025-01-18T08:09:21.249" v="1232" actId="20577"/>
-          <ac:spMkLst>
-            <pc:docMk/>
-            <pc:sldMk cId="1139963010" sldId="260"/>
-            <ac:spMk id="88" creationId="{F17D3A54-A27A-14A5-271C-3ADBAE7ABF73}"/>
-          </ac:spMkLst>
-        </pc:spChg>
-        <pc:spChg chg="del">
-          <ac:chgData name="Susana Vásquez" userId="dffc548e-2323-4ffc-a8aa-757e426c1faa" providerId="ADAL" clId="{7C6D53C4-A734-4D7D-8378-8004A93D69CB}" dt="2025-01-18T08:10:35.361" v="1244" actId="478"/>
-          <ac:spMkLst>
-            <pc:docMk/>
-            <pc:sldMk cId="1139963010" sldId="260"/>
-            <ac:spMk id="89" creationId="{83E89DC1-BF96-5C7E-6D77-D5807FD17B7C}"/>
-          </ac:spMkLst>
-        </pc:spChg>
-        <pc:graphicFrameChg chg="add mod modGraphic">
-          <ac:chgData name="Susana Vásquez" userId="dffc548e-2323-4ffc-a8aa-757e426c1faa" providerId="ADAL" clId="{7C6D53C4-A734-4D7D-8378-8004A93D69CB}" dt="2025-01-18T08:41:27.185" v="1729" actId="1076"/>
-          <ac:graphicFrameMkLst>
-            <pc:docMk/>
-            <pc:sldMk cId="1139963010" sldId="260"/>
-            <ac:graphicFrameMk id="5" creationId="{9EFAECC8-31B7-A2E0-E375-E6571D2BF263}"/>
-          </ac:graphicFrameMkLst>
-        </pc:graphicFrameChg>
-        <pc:graphicFrameChg chg="add mod modGraphic">
-          <ac:chgData name="Susana Vásquez" userId="dffc548e-2323-4ffc-a8aa-757e426c1faa" providerId="ADAL" clId="{7C6D53C4-A734-4D7D-8378-8004A93D69CB}" dt="2025-01-18T08:41:29.284" v="1730" actId="14100"/>
-          <ac:graphicFrameMkLst>
-            <pc:docMk/>
-            <pc:sldMk cId="1139963010" sldId="260"/>
-            <ac:graphicFrameMk id="6" creationId="{CB19A486-E06E-5A8D-B341-F5E17EF0416D}"/>
-          </ac:graphicFrameMkLst>
-        </pc:graphicFrameChg>
       </pc:sldChg>
       <pc:sldChg chg="modSp del mod">
         <pc:chgData name="Susana Vásquez" userId="dffc548e-2323-4ffc-a8aa-757e426c1faa" providerId="ADAL" clId="{7C6D53C4-A734-4D7D-8378-8004A93D69CB}" dt="2025-01-18T08:06:41.261" v="993" actId="47"/>
@@ -607,22 +359,46 @@
           <pc:docMk/>
           <pc:sldMk cId="0" sldId="261"/>
         </pc:sldMkLst>
+      </pc:sldChg>
+    </pc:docChg>
+  </pc:docChgLst>
+  <pc:docChgLst>
+    <pc:chgData name="Susana Vasquez Elias" userId="e776416f-e583-4d77-b224-146689d50a03" providerId="ADAL" clId="{3C100498-C411-419B-B5E6-C2EF21CD595F}"/>
+    <pc:docChg chg="custSel modSld">
+      <pc:chgData name="Susana Vasquez Elias" userId="e776416f-e583-4d77-b224-146689d50a03" providerId="ADAL" clId="{3C100498-C411-419B-B5E6-C2EF21CD595F}" dt="2025-10-16T17:43:03.541" v="5" actId="14100"/>
+      <pc:docMkLst>
+        <pc:docMk/>
+      </pc:docMkLst>
+      <pc:sldChg chg="addSp delSp modSp mod">
+        <pc:chgData name="Susana Vasquez Elias" userId="e776416f-e583-4d77-b224-146689d50a03" providerId="ADAL" clId="{3C100498-C411-419B-B5E6-C2EF21CD595F}" dt="2025-10-16T17:43:03.541" v="5" actId="14100"/>
+        <pc:sldMkLst>
+          <pc:docMk/>
+          <pc:sldMk cId="0" sldId="256"/>
+        </pc:sldMkLst>
         <pc:spChg chg="mod">
-          <ac:chgData name="Susana Vásquez" userId="dffc548e-2323-4ffc-a8aa-757e426c1faa" providerId="ADAL" clId="{7C6D53C4-A734-4D7D-8378-8004A93D69CB}" dt="2025-01-18T08:04:41.913" v="829" actId="790"/>
+          <ac:chgData name="Susana Vasquez Elias" userId="e776416f-e583-4d77-b224-146689d50a03" providerId="ADAL" clId="{3C100498-C411-419B-B5E6-C2EF21CD595F}" dt="2025-10-16T17:42:55.237" v="1" actId="27636"/>
           <ac:spMkLst>
             <pc:docMk/>
-            <pc:sldMk cId="0" sldId="261"/>
-            <ac:spMk id="106" creationId="{00000000-0000-0000-0000-000000000000}"/>
+            <pc:sldMk cId="0" sldId="256"/>
+            <ac:spMk id="75" creationId="{00000000-0000-0000-0000-000000000000}"/>
           </ac:spMkLst>
         </pc:spChg>
-        <pc:spChg chg="mod">
-          <ac:chgData name="Susana Vásquez" userId="dffc548e-2323-4ffc-a8aa-757e426c1faa" providerId="ADAL" clId="{7C6D53C4-A734-4D7D-8378-8004A93D69CB}" dt="2025-01-18T08:04:41.913" v="829" actId="790"/>
-          <ac:spMkLst>
+        <pc:picChg chg="add mod">
+          <ac:chgData name="Susana Vasquez Elias" userId="e776416f-e583-4d77-b224-146689d50a03" providerId="ADAL" clId="{3C100498-C411-419B-B5E6-C2EF21CD595F}" dt="2025-10-16T17:43:03.541" v="5" actId="14100"/>
+          <ac:picMkLst>
             <pc:docMk/>
-            <pc:sldMk cId="0" sldId="261"/>
-            <ac:spMk id="107" creationId="{00000000-0000-0000-0000-000000000000}"/>
-          </ac:spMkLst>
-        </pc:spChg>
+            <pc:sldMk cId="0" sldId="256"/>
+            <ac:picMk id="2" creationId="{2ADF4236-C311-988C-1EAF-F33444BF8989}"/>
+          </ac:picMkLst>
+        </pc:picChg>
+        <pc:picChg chg="add del mod">
+          <ac:chgData name="Susana Vasquez Elias" userId="e776416f-e583-4d77-b224-146689d50a03" providerId="ADAL" clId="{3C100498-C411-419B-B5E6-C2EF21CD595F}" dt="2025-10-16T17:43:01.249" v="4" actId="478"/>
+          <ac:picMkLst>
+            <pc:docMk/>
+            <pc:sldMk cId="0" sldId="256"/>
+            <ac:picMk id="3" creationId="{914469BA-2007-C1B4-D3A8-88E055565FA2}"/>
+          </ac:picMkLst>
+        </pc:picChg>
       </pc:sldChg>
     </pc:docChg>
   </pc:docChgLst>
@@ -7214,8 +6990,8 @@
         </p:nvSpPr>
         <p:spPr>
           <a:xfrm>
-            <a:off x="1794838" y="1287200"/>
-            <a:ext cx="7061395" cy="1623851"/>
+            <a:off x="1276350" y="1287200"/>
+            <a:ext cx="7579883" cy="1623851"/>
           </a:xfrm>
           <a:prstGeom prst="rect">
             <a:avLst/>
@@ -7227,11 +7003,11 @@
         </p:spPr>
         <p:txBody>
           <a:bodyPr spcFirstLastPara="1" wrap="square" lIns="91425" tIns="45700" rIns="91425" bIns="45700" anchor="ctr" anchorCtr="0">
-            <a:normAutofit/>
+            <a:normAutofit fontScale="90000"/>
           </a:bodyPr>
           <a:lstStyle/>
           <a:p>
-            <a:pPr xmlns:a="http://schemas.openxmlformats.org/drawingml/2006/main" marL="0" lvl="0" indent="0" algn="ctr" rtl="0">
+            <a:pPr marL="0" lvl="0" indent="0" algn="ctr" rtl="0">
               <a:lnSpc>
                 <a:spcPct val="150000"/>
               </a:lnSpc>
@@ -7248,7 +7024,7 @@
               <a:buFont typeface="Arial"/>
               <a:buNone/>
             </a:pPr>
-            <a:r xmlns:a="http://schemas.openxmlformats.org/drawingml/2006/main">
+            <a:r>
               <a:rPr lang="es" sz="3100" noProof="0" dirty="0">
                 <a:latin typeface="Avenir"/>
                 <a:ea typeface="Avenir"/>
@@ -7257,7 +7033,7 @@
               </a:rPr>
               <a:t>¿Qué caracteriza a un modelo de candado? </a:t>
             </a:r>
-            <a:br xmlns:a="http://schemas.openxmlformats.org/drawingml/2006/main">
+            <a:br>
               <a:rPr lang="ca-ES" sz="3100" noProof="0" dirty="0">
                 <a:latin typeface="Avenir"/>
                 <a:ea typeface="Avenir"/>
@@ -7265,7 +7041,7 @@
                 <a:sym typeface="Avenir"/>
               </a:rPr>
             </a:br>
-            <a:r xmlns:a="http://schemas.openxmlformats.org/drawingml/2006/main">
+            <a:r>
               <a:rPr lang="es" sz="3100" noProof="0" dirty="0">
                 <a:latin typeface="Avenir"/>
                 <a:ea typeface="Avenir"/>
@@ -7274,7 +7050,7 @@
               </a:rPr>
               <a:t>¿Qué modelos existen? ¿Cómo les denominamos?</a:t>
             </a:r>
-            <a:endParaRPr xmlns:a="http://schemas.openxmlformats.org/drawingml/2006/main" lang="ca-ES" sz="2900" noProof="0" dirty="0">
+            <a:endParaRPr lang="ca-ES" sz="2900" noProof="0" dirty="0">
               <a:latin typeface="Avenir"/>
               <a:ea typeface="Avenir"/>
               <a:cs typeface="Avenir"/>
@@ -7335,7 +7111,7 @@
           </a:bodyPr>
           <a:lstStyle/>
           <a:p>
-            <a:pPr xmlns:a="http://schemas.openxmlformats.org/drawingml/2006/main" marL="0" marR="0" lvl="0" indent="0" algn="l" rtl="0">
+            <a:pPr marL="0" marR="0" lvl="0" indent="0" algn="l" rtl="0">
               <a:lnSpc>
                 <a:spcPct val="150000"/>
               </a:lnSpc>
@@ -7352,7 +7128,7 @@
               <a:buFont typeface="Arial"/>
               <a:buNone/>
             </a:pPr>
-            <a:r xmlns:a="http://schemas.openxmlformats.org/drawingml/2006/main">
+            <a:r>
               <a:rPr lang="es" sz="2400" b="1" i="0" u="none" strike="noStrike" cap="none" noProof="0" dirty="0">
                 <a:solidFill>
                   <a:srgbClr val="262626"/>
@@ -7364,7 +7140,7 @@
               </a:rPr>
               <a:t>Miembros del grupo de trabajo:</a:t>
             </a:r>
-            <a:endParaRPr xmlns:a="http://schemas.openxmlformats.org/drawingml/2006/main" lang="ca-ES" noProof="0" dirty="0">
+            <a:endParaRPr lang="ca-ES" noProof="0" dirty="0">
               <a:latin typeface="Avenir"/>
               <a:ea typeface="Avenir"/>
               <a:cs typeface="Avenir"/>
@@ -7372,7 +7148,7 @@
             </a:endParaRPr>
           </a:p>
           <a:p>
-            <a:pPr xmlns:a="http://schemas.openxmlformats.org/drawingml/2006/main" marL="342900" marR="0" lvl="0" indent="-342900" algn="l" rtl="0">
+            <a:pPr marL="342900" marR="0" lvl="0" indent="-342900" algn="l" rtl="0">
               <a:lnSpc>
                 <a:spcPct val="150000"/>
               </a:lnSpc>
@@ -7389,7 +7165,7 @@
               <a:buFont typeface="Avenir"/>
               <a:buChar char="▪"/>
             </a:pPr>
-            <a:r xmlns:a="http://schemas.openxmlformats.org/drawingml/2006/main">
+            <a:r>
               <a:rPr lang="es" sz="2400" i="0" u="none" strike="noStrike" cap="none" noProof="0" dirty="0">
                 <a:solidFill>
                   <a:srgbClr val="262626"/>
@@ -7401,7 +7177,7 @@
               </a:rPr>
               <a:t>...</a:t>
             </a:r>
-            <a:endParaRPr xmlns:a="http://schemas.openxmlformats.org/drawingml/2006/main" lang="ca-ES" noProof="0" dirty="0">
+            <a:endParaRPr lang="ca-ES" noProof="0" dirty="0">
               <a:latin typeface="Avenir"/>
               <a:ea typeface="Avenir"/>
               <a:cs typeface="Avenir"/>
@@ -7409,7 +7185,7 @@
             </a:endParaRPr>
           </a:p>
           <a:p>
-            <a:pPr xmlns:a="http://schemas.openxmlformats.org/drawingml/2006/main" marL="342900" marR="0" lvl="0" indent="-342900" algn="l" rtl="0">
+            <a:pPr marL="342900" marR="0" lvl="0" indent="-342900" algn="l" rtl="0">
               <a:lnSpc>
                 <a:spcPct val="150000"/>
               </a:lnSpc>
@@ -7426,7 +7202,7 @@
               <a:buFont typeface="Avenir"/>
               <a:buChar char="▪"/>
             </a:pPr>
-            <a:r xmlns:a="http://schemas.openxmlformats.org/drawingml/2006/main">
+            <a:r>
               <a:rPr lang="es" sz="2400" i="0" u="none" strike="noStrike" cap="none" noProof="0" dirty="0">
                 <a:solidFill>
                   <a:srgbClr val="262626"/>
@@ -7438,7 +7214,7 @@
               </a:rPr>
               <a:t>...</a:t>
             </a:r>
-            <a:endParaRPr xmlns:a="http://schemas.openxmlformats.org/drawingml/2006/main" lang="ca-ES" noProof="0" dirty="0">
+            <a:endParaRPr lang="ca-ES" noProof="0" dirty="0">
               <a:latin typeface="Avenir"/>
               <a:ea typeface="Avenir"/>
               <a:cs typeface="Avenir"/>
@@ -7446,7 +7222,7 @@
             </a:endParaRPr>
           </a:p>
           <a:p>
-            <a:pPr xmlns:a="http://schemas.openxmlformats.org/drawingml/2006/main" marL="342900" marR="0" lvl="0" indent="-342900" algn="l" rtl="0">
+            <a:pPr marL="342900" marR="0" lvl="0" indent="-342900" algn="l" rtl="0">
               <a:lnSpc>
                 <a:spcPct val="150000"/>
               </a:lnSpc>
@@ -7463,7 +7239,7 @@
               <a:buFont typeface="Avenir"/>
               <a:buChar char="▪"/>
             </a:pPr>
-            <a:r xmlns:a="http://schemas.openxmlformats.org/drawingml/2006/main">
+            <a:r>
               <a:rPr lang="es" sz="2400" i="0" u="none" strike="noStrike" cap="none" noProof="0" dirty="0">
                 <a:solidFill>
                   <a:srgbClr val="262626"/>
@@ -7475,7 +7251,7 @@
               </a:rPr>
               <a:t>...</a:t>
             </a:r>
-            <a:endParaRPr xmlns:a="http://schemas.openxmlformats.org/drawingml/2006/main" lang="ca-ES" noProof="0" dirty="0">
+            <a:endParaRPr lang="ca-ES" noProof="0" dirty="0">
               <a:latin typeface="Avenir"/>
               <a:ea typeface="Avenir"/>
               <a:cs typeface="Avenir"/>
@@ -7483,7 +7259,7 @@
             </a:endParaRPr>
           </a:p>
           <a:p>
-            <a:pPr xmlns:a="http://schemas.openxmlformats.org/drawingml/2006/main" marL="342900" marR="0" lvl="0" indent="-342900" algn="l" rtl="0">
+            <a:pPr marL="342900" marR="0" lvl="0" indent="-342900" algn="l" rtl="0">
               <a:lnSpc>
                 <a:spcPct val="150000"/>
               </a:lnSpc>
@@ -7500,7 +7276,7 @@
               <a:buFont typeface="Avenir"/>
               <a:buChar char="▪"/>
             </a:pPr>
-            <a:r xmlns:a="http://schemas.openxmlformats.org/drawingml/2006/main">
+            <a:r>
               <a:rPr lang="es" sz="2400" i="0" u="none" strike="noStrike" cap="none" noProof="0" dirty="0">
                 <a:solidFill>
                   <a:srgbClr val="262626"/>
@@ -7512,7 +7288,7 @@
               </a:rPr>
               <a:t>...</a:t>
             </a:r>
-            <a:endParaRPr xmlns:a="http://schemas.openxmlformats.org/drawingml/2006/main" lang="ca-ES" noProof="0" dirty="0">
+            <a:endParaRPr lang="ca-ES" noProof="0" dirty="0">
               <a:latin typeface="Avenir"/>
               <a:ea typeface="Avenir"/>
               <a:cs typeface="Avenir"/>
@@ -7521,6 +7297,52 @@
           </a:p>
         </p:txBody>
       </p:sp>
+      <p:pic>
+        <p:nvPicPr>
+          <p:cNvPr id="2" name="Picture 1" descr="A grey square with white text&#10;&#10;AI-generated content may be incorrect.">
+            <a:extLst>
+              <a:ext uri="{FF2B5EF4-FFF2-40B4-BE49-F238E27FC236}">
+                <a16:creationId xmlns:a16="http://schemas.microsoft.com/office/drawing/2014/main" id="{2ADF4236-C311-988C-1EAF-F33444BF8989}"/>
+              </a:ext>
+            </a:extLst>
+          </p:cNvPr>
+          <p:cNvPicPr>
+            <a:picLocks noChangeAspect="1"/>
+          </p:cNvPicPr>
+          <p:nvPr/>
+        </p:nvPicPr>
+        <p:blipFill rotWithShape="1">
+          <a:blip r:embed="rId4">
+            <a:extLst>
+              <a:ext uri="{28A0092B-C50C-407E-A947-70E740481C1C}">
+                <a14:useLocalDpi xmlns:a14="http://schemas.microsoft.com/office/drawing/2010/main" val="0"/>
+              </a:ext>
+            </a:extLst>
+          </a:blip>
+          <a:srcRect r="18171" b="16231"/>
+          <a:stretch>
+            <a:fillRect/>
+          </a:stretch>
+        </p:blipFill>
+        <p:spPr bwMode="auto">
+          <a:xfrm>
+            <a:off x="5605429" y="5457825"/>
+            <a:ext cx="3140427" cy="835605"/>
+          </a:xfrm>
+          <a:prstGeom prst="rect">
+            <a:avLst/>
+          </a:prstGeom>
+          <a:noFill/>
+          <a:ln>
+            <a:noFill/>
+          </a:ln>
+          <a:extLst>
+            <a:ext uri="{53640926-AAD7-44D8-BBD7-CCE9431645EC}">
+              <a14:shadowObscured xmlns:a14="http://schemas.microsoft.com/office/drawing/2010/main"/>
+            </a:ext>
+          </a:extLst>
+        </p:spPr>
+      </p:pic>
     </p:spTree>
   </p:cSld>
   <p:clrMapOvr>
@@ -7575,7 +7397,7 @@
           </a:bodyPr>
           <a:lstStyle/>
           <a:p>
-            <a:pPr xmlns:a="http://schemas.openxmlformats.org/drawingml/2006/main" marL="0" lvl="0" indent="0" algn="l" rtl="0">
+            <a:pPr marL="0" lvl="0" indent="0" algn="l" rtl="0">
               <a:spcBef>
                 <a:spcPts val="0"/>
               </a:spcBef>
@@ -7584,7 +7406,7 @@
               </a:spcAft>
               <a:buNone/>
             </a:pPr>
-            <a:r xmlns:a="http://schemas.openxmlformats.org/drawingml/2006/main">
+            <a:r>
               <a:rPr lang="es" sz="1600" noProof="0" dirty="0">
                 <a:latin typeface="Avenir"/>
                 <a:ea typeface="Avenir"/>
@@ -7648,7 +7470,7 @@
                     <a:bodyPr/>
                     <a:lstStyle/>
                     <a:p>
-                      <a:r xmlns:a="http://schemas.openxmlformats.org/drawingml/2006/main">
+                      <a:r>
                         <a:rPr lang="es" noProof="0" dirty="0">
                           <a:solidFill>
                             <a:srgbClr val="150343"/>
@@ -7659,7 +7481,7 @@
                       </a:r>
                     </a:p>
                     <a:p>
-                      <a:pPr xmlns:a="http://schemas.openxmlformats.org/drawingml/2006/main" marL="0" marR="0" lvl="0" indent="0" algn="l" defTabSz="914400" rtl="0" eaLnBrk="1" fontAlgn="auto" latinLnBrk="0" hangingPunct="1">
+                      <a:pPr marL="0" marR="0" lvl="0" indent="0" algn="l" defTabSz="914400" rtl="0" eaLnBrk="1" fontAlgn="auto" latinLnBrk="0" hangingPunct="1">
                         <a:lnSpc>
                           <a:spcPct val="100000"/>
                         </a:lnSpc>
@@ -7678,7 +7500,7 @@
                         <a:tabLst/>
                         <a:defRPr/>
                       </a:pPr>
-                      <a:r xmlns:a="http://schemas.openxmlformats.org/drawingml/2006/main">
+                      <a:r>
                         <a:rPr lang="es" b="0" noProof="0" dirty="0">
                           <a:latin typeface="Avenir"/>
                         </a:rPr>
@@ -7706,7 +7528,7 @@
                     <a:bodyPr/>
                     <a:lstStyle/>
                     <a:p>
-                      <a:r xmlns:a="http://schemas.openxmlformats.org/drawingml/2006/main">
+                      <a:r>
                         <a:rPr lang="es" noProof="0" dirty="0">
                           <a:solidFill>
                             <a:srgbClr val="150343"/>
@@ -7717,7 +7539,7 @@
                       </a:r>
                     </a:p>
                     <a:p>
-                      <a:pPr xmlns:a="http://schemas.openxmlformats.org/drawingml/2006/main" marL="0" marR="0" lvl="0" indent="0" algn="l" defTabSz="914400" rtl="0" eaLnBrk="1" fontAlgn="auto" latinLnBrk="0" hangingPunct="1">
+                      <a:pPr marL="0" marR="0" lvl="0" indent="0" algn="l" defTabSz="914400" rtl="0" eaLnBrk="1" fontAlgn="auto" latinLnBrk="0" hangingPunct="1">
                         <a:lnSpc>
                           <a:spcPct val="100000"/>
                         </a:lnSpc>
@@ -7736,7 +7558,7 @@
                         <a:tabLst/>
                         <a:defRPr/>
                       </a:pPr>
-                      <a:r xmlns:a="http://schemas.openxmlformats.org/drawingml/2006/main">
+                      <a:r>
                         <a:rPr lang="es" b="0" noProof="0" dirty="0">
                           <a:latin typeface="Avenir"/>
                         </a:rPr>
@@ -8486,7 +8308,7 @@
                     <a:bodyPr/>
                     <a:lstStyle/>
                     <a:p>
-                      <a:pPr xmlns:a="http://schemas.openxmlformats.org/drawingml/2006/main" marL="0" marR="0" lvl="0" indent="0" algn="l" defTabSz="914400" rtl="0" eaLnBrk="1" fontAlgn="auto" latinLnBrk="0" hangingPunct="1">
+                      <a:pPr marL="0" marR="0" lvl="0" indent="0" algn="l" defTabSz="914400" rtl="0" eaLnBrk="1" fontAlgn="auto" latinLnBrk="0" hangingPunct="1">
                         <a:lnSpc>
                           <a:spcPct val="100000"/>
                         </a:lnSpc>
@@ -8505,7 +8327,7 @@
                         <a:tabLst/>
                         <a:defRPr/>
                       </a:pPr>
-                      <a:r xmlns:a="http://schemas.openxmlformats.org/drawingml/2006/main">
+                      <a:r>
                         <a:rPr lang="es" noProof="0" dirty="0">
                           <a:solidFill>
                             <a:srgbClr val="150343"/>
@@ -8516,7 +8338,7 @@
                       </a:r>
                     </a:p>
                     <a:p>
-                      <a:pPr xmlns:a="http://schemas.openxmlformats.org/drawingml/2006/main" marL="0" marR="0" lvl="0" indent="0" algn="l" defTabSz="914400" rtl="0" eaLnBrk="1" fontAlgn="auto" latinLnBrk="0" hangingPunct="1">
+                      <a:pPr marL="0" marR="0" lvl="0" indent="0" algn="l" defTabSz="914400" rtl="0" eaLnBrk="1" fontAlgn="auto" latinLnBrk="0" hangingPunct="1">
                         <a:lnSpc>
                           <a:spcPct val="100000"/>
                         </a:lnSpc>
@@ -8535,13 +8357,13 @@
                         <a:tabLst/>
                         <a:defRPr/>
                       </a:pPr>
-                      <a:r xmlns:a="http://schemas.openxmlformats.org/drawingml/2006/main">
+                      <a:r>
                         <a:rPr lang="es" b="0" noProof="0" dirty="0">
                           <a:latin typeface="Avenir"/>
                         </a:rPr>
                         <a:t>Proponga un nombre para identificar a este grupo que haga referencia a la estrategia de cálculo.</a:t>
                       </a:r>
-                      <a:endParaRPr xmlns:a="http://schemas.openxmlformats.org/drawingml/2006/main" lang="ca-ES" b="0" noProof="0" dirty="0"/>
+                      <a:endParaRPr lang="ca-ES" b="0" noProof="0" dirty="0"/>
                     </a:p>
                   </a:txBody>
                   <a:tcPr anchor="ctr">
@@ -8678,7 +8500,7 @@
           </a:bodyPr>
           <a:lstStyle/>
           <a:p>
-            <a:r xmlns:a="http://schemas.openxmlformats.org/drawingml/2006/main">
+            <a:r>
               <a:rPr lang="es" noProof="0" dirty="0">
                 <a:solidFill>
                   <a:srgbClr val="FF0000"/>
@@ -8743,7 +8565,7 @@
           </a:bodyPr>
           <a:lstStyle/>
           <a:p>
-            <a:pPr xmlns:a="http://schemas.openxmlformats.org/drawingml/2006/main" marL="0" lvl="0" indent="0" algn="l" rtl="0">
+            <a:pPr marL="0" lvl="0" indent="0" algn="l" rtl="0">
               <a:lnSpc>
                 <a:spcPct val="130000"/>
               </a:lnSpc>
@@ -8756,7 +8578,7 @@
               <a:buSzPts val="2000"/>
               <a:buNone/>
             </a:pPr>
-            <a:r xmlns:a="http://schemas.openxmlformats.org/drawingml/2006/main">
+            <a:r>
               <a:rPr lang="es" b="1" noProof="0" dirty="0">
                 <a:latin typeface="Avenir"/>
                 <a:ea typeface="Avenir"/>
@@ -8765,7 +8587,7 @@
               </a:rPr>
               <a:t>Modelos de candados</a:t>
             </a:r>
-            <a:endParaRPr xmlns:a="http://schemas.openxmlformats.org/drawingml/2006/main" lang="ca-ES" noProof="0" dirty="0">
+            <a:endParaRPr lang="ca-ES" noProof="0" dirty="0">
               <a:latin typeface="Avenir"/>
               <a:ea typeface="Avenir"/>
               <a:cs typeface="Avenir"/>
@@ -8773,7 +8595,7 @@
             </a:endParaRPr>
           </a:p>
           <a:p>
-            <a:pPr xmlns:a="http://schemas.openxmlformats.org/drawingml/2006/main" marL="228600" lvl="0" indent="-228600" algn="l" rtl="0">
+            <a:pPr marL="228600" lvl="0" indent="-228600" algn="l" rtl="0">
               <a:lnSpc>
                 <a:spcPct val="130000"/>
               </a:lnSpc>
@@ -8787,7 +8609,7 @@
               <a:buFont typeface="Avenir"/>
               <a:buChar char="◼"/>
             </a:pPr>
-            <a:r xmlns:a="http://schemas.openxmlformats.org/drawingml/2006/main">
+            <a:r>
               <a:rPr lang="es" noProof="0" dirty="0">
                 <a:latin typeface="Avenir"/>
                 <a:ea typeface="Avenir"/>
@@ -8798,7 +8620,7 @@
             </a:r>
           </a:p>
           <a:p>
-            <a:pPr xmlns:a="http://schemas.openxmlformats.org/drawingml/2006/main" marL="228600" lvl="0" indent="-228600" algn="l" rtl="0">
+            <a:pPr marL="228600" lvl="0" indent="-228600" algn="l" rtl="0">
               <a:lnSpc>
                 <a:spcPct val="130000"/>
               </a:lnSpc>
@@ -8812,7 +8634,7 @@
               <a:buFont typeface="Avenir"/>
               <a:buChar char="◼"/>
             </a:pPr>
-            <a:r xmlns:a="http://schemas.openxmlformats.org/drawingml/2006/main">
+            <a:r>
               <a:rPr lang="es" noProof="0" dirty="0">
                 <a:latin typeface="Avenir"/>
                 <a:ea typeface="Avenir"/>
@@ -8823,14 +8645,14 @@
             </a:r>
           </a:p>
           <a:p>
-            <a:pPr xmlns:a="http://schemas.openxmlformats.org/drawingml/2006/main" marL="228600" indent="-228600">
+            <a:pPr marL="228600" indent="-228600">
               <a:spcBef>
                 <a:spcPts val="600"/>
               </a:spcBef>
               <a:buFont typeface="Avenir"/>
               <a:buChar char="◼"/>
             </a:pPr>
-            <a:r xmlns:a="http://schemas.openxmlformats.org/drawingml/2006/main">
+            <a:r>
               <a:rPr lang="es" noProof="0" dirty="0">
                 <a:latin typeface="Avenir"/>
                 <a:ea typeface="Avenir"/>
@@ -8839,17 +8661,17 @@
               </a:rPr>
               <a:t>El modelo _______ incluye los candados que ____________. El número de códigos lo encontramos _______________.</a:t>
             </a:r>
-            <a:endParaRPr xmlns:a="http://schemas.openxmlformats.org/drawingml/2006/main" lang="ca-ES" noProof="0" dirty="0"/>
+            <a:endParaRPr lang="ca-ES" noProof="0" dirty="0"/>
           </a:p>
           <a:p>
-            <a:pPr xmlns:a="http://schemas.openxmlformats.org/drawingml/2006/main" marL="228600" indent="-228600">
+            <a:pPr marL="228600" indent="-228600">
               <a:spcBef>
                 <a:spcPts val="600"/>
               </a:spcBef>
               <a:buFont typeface="Avenir"/>
               <a:buChar char="◼"/>
             </a:pPr>
-            <a:r xmlns:a="http://schemas.openxmlformats.org/drawingml/2006/main">
+            <a:r>
               <a:rPr lang="es" noProof="0" dirty="0">
                 <a:latin typeface="Avenir"/>
                 <a:ea typeface="Avenir"/>
@@ -8858,7 +8680,7 @@
               </a:rPr>
               <a:t>El modelo </a:t>
             </a:r>
-            <a:r xmlns:a="http://schemas.openxmlformats.org/drawingml/2006/main">
+            <a:r>
               <a:rPr lang="es" noProof="0">
                 <a:latin typeface="Avenir"/>
                 <a:ea typeface="Avenir"/>
@@ -8867,7 +8689,7 @@
               </a:rPr>
               <a:t>_______ incluye los candados que ____________. </a:t>
             </a:r>
-            <a:r xmlns:a="http://schemas.openxmlformats.org/drawingml/2006/main">
+            <a:r>
               <a:rPr lang="es" noProof="0" dirty="0">
                 <a:latin typeface="Avenir"/>
                 <a:ea typeface="Avenir"/>
@@ -8878,14 +8700,14 @@
             </a:r>
           </a:p>
           <a:p>
-            <a:pPr xmlns:a="http://schemas.openxmlformats.org/drawingml/2006/main" marL="228600" indent="-228600">
+            <a:pPr marL="228600" indent="-228600">
               <a:spcBef>
                 <a:spcPts val="600"/>
               </a:spcBef>
               <a:buFont typeface="Avenir"/>
               <a:buChar char="◼"/>
             </a:pPr>
-            <a:r xmlns:a="http://schemas.openxmlformats.org/drawingml/2006/main">
+            <a:r>
               <a:rPr lang="es" dirty="0">
                 <a:latin typeface="Avenir"/>
                 <a:ea typeface="Avenir"/>
@@ -8932,7 +8754,7 @@
           </a:bodyPr>
           <a:lstStyle/>
           <a:p>
-            <a:pPr xmlns:a="http://schemas.openxmlformats.org/drawingml/2006/main" marL="0" lvl="0" indent="0" algn="l" rtl="0">
+            <a:pPr marL="0" lvl="0" indent="0" algn="l" rtl="0">
               <a:spcBef>
                 <a:spcPts val="0"/>
               </a:spcBef>
@@ -8941,7 +8763,7 @@
               </a:spcAft>
               <a:buNone/>
             </a:pPr>
-            <a:r xmlns:a="http://schemas.openxmlformats.org/drawingml/2006/main">
+            <a:r>
               <a:rPr lang="es" sz="1600" noProof="0" dirty="0">
                 <a:latin typeface="Avenir"/>
                 <a:ea typeface="Avenir"/>
@@ -9019,7 +8841,7 @@
           </a:bodyPr>
           <a:lstStyle/>
           <a:p>
-            <a:pPr xmlns:a="http://schemas.openxmlformats.org/drawingml/2006/main" marL="0" lvl="0" indent="0" algn="l" rtl="0">
+            <a:pPr marL="0" lvl="0" indent="0" algn="l" rtl="0">
               <a:lnSpc>
                 <a:spcPct val="130000"/>
               </a:lnSpc>
@@ -9032,7 +8854,7 @@
               <a:buSzPts val="2000"/>
               <a:buNone/>
             </a:pPr>
-            <a:r xmlns:a="http://schemas.openxmlformats.org/drawingml/2006/main">
+            <a:r>
               <a:rPr lang="es" b="1" noProof="0" dirty="0">
                 <a:latin typeface="Avenir"/>
                 <a:ea typeface="Avenir"/>
@@ -9041,23 +8863,23 @@
               </a:rPr>
               <a:t>Variables que definen los modelos de candados</a:t>
             </a:r>
-            <a:endParaRPr xmlns:a="http://schemas.openxmlformats.org/drawingml/2006/main" lang="ca-ES" noProof="0" dirty="0"/>
+            <a:endParaRPr lang="ca-ES" noProof="0" dirty="0"/>
           </a:p>
           <a:p>
-            <a:pPr xmlns:a="http://schemas.openxmlformats.org/drawingml/2006/main" marL="342900" indent="-342900">
+            <a:pPr marL="342900" indent="-342900">
               <a:spcBef>
                 <a:spcPts val="600"/>
               </a:spcBef>
             </a:pPr>
-            <a:r xmlns:a="http://schemas.openxmlformats.org/drawingml/2006/main">
+            <a:r>
               <a:rPr lang="es" noProof="0" dirty="0"/>
               <a:t>Identifique las </a:t>
             </a:r>
-            <a:r xmlns:a="http://schemas.openxmlformats.org/drawingml/2006/main">
+            <a:r>
               <a:rPr lang="es" b="1" noProof="0" dirty="0"/>
               <a:t>variables numéricas </a:t>
             </a:r>
-            <a:r xmlns:a="http://schemas.openxmlformats.org/drawingml/2006/main">
+            <a:r>
               <a:rPr lang="es" noProof="0" dirty="0"/>
               <a:t>que definen los candados e indique el valor numérico que toman en cada candado.</a:t>
             </a:r>
@@ -9099,7 +8921,7 @@
           </a:bodyPr>
           <a:lstStyle/>
           <a:p>
-            <a:pPr xmlns:a="http://schemas.openxmlformats.org/drawingml/2006/main" marL="0" lvl="0" indent="0" algn="l" rtl="0">
+            <a:pPr marL="0" lvl="0" indent="0" algn="l" rtl="0">
               <a:spcBef>
                 <a:spcPts val="0"/>
               </a:spcBef>
@@ -9108,7 +8930,7 @@
               </a:spcAft>
               <a:buNone/>
             </a:pPr>
-            <a:r xmlns:a="http://schemas.openxmlformats.org/drawingml/2006/main">
+            <a:r>
               <a:rPr lang="es" sz="1600" noProof="0" dirty="0">
                 <a:latin typeface="Avenir"/>
                 <a:ea typeface="Avenir"/>
@@ -9179,7 +9001,7 @@
                     <a:bodyPr/>
                     <a:lstStyle/>
                     <a:p>
-                      <a:r xmlns:a="http://schemas.openxmlformats.org/drawingml/2006/main">
+                      <a:r>
                         <a:rPr lang="es" b="1" noProof="0" dirty="0">
                           <a:solidFill>
                             <a:srgbClr val="150343"/>
@@ -9210,7 +9032,7 @@
                     <a:bodyPr/>
                     <a:lstStyle/>
                     <a:p>
-                      <a:r xmlns:a="http://schemas.openxmlformats.org/drawingml/2006/main">
+                      <a:r>
                         <a:rPr lang="es" b="1" noProof="0" dirty="0">
                           <a:solidFill>
                             <a:srgbClr val="150343"/>
@@ -9219,7 +9041,7 @@
                         </a:rPr>
                         <a:t>Valor de la variable “_____________”</a:t>
                       </a:r>
-                      <a:endParaRPr xmlns:a="http://schemas.openxmlformats.org/drawingml/2006/main" lang="ca-ES" b="0" noProof="0" dirty="0">
+                      <a:endParaRPr lang="ca-ES" b="0" noProof="0" dirty="0">
                         <a:solidFill>
                           <a:srgbClr val="150343"/>
                         </a:solidFill>
@@ -9247,7 +9069,7 @@
                     <a:bodyPr/>
                     <a:lstStyle/>
                     <a:p>
-                      <a:r xmlns:a="http://schemas.openxmlformats.org/drawingml/2006/main">
+                      <a:r>
                         <a:rPr lang="es" b="1" noProof="0" dirty="0">
                           <a:solidFill>
                             <a:srgbClr val="150343"/>
@@ -9285,7 +9107,7 @@
                     <a:bodyPr/>
                     <a:lstStyle/>
                     <a:p>
-                      <a:r xmlns:a="http://schemas.openxmlformats.org/drawingml/2006/main">
+                      <a:r>
                         <a:rPr lang="es" b="0" noProof="0" dirty="0">
                           <a:solidFill>
                             <a:srgbClr val="150343"/>
@@ -9484,7 +9306,7 @@
                     <a:bodyPr/>
                     <a:lstStyle/>
                     <a:p>
-                      <a:r xmlns:a="http://schemas.openxmlformats.org/drawingml/2006/main">
+                      <a:r>
                         <a:rPr lang="es" b="0" noProof="0" dirty="0">
                           <a:solidFill>
                             <a:srgbClr val="150343"/>
@@ -10928,7 +10750,7 @@
           </a:bodyPr>
           <a:lstStyle/>
           <a:p>
-            <a:pPr xmlns:a="http://schemas.openxmlformats.org/drawingml/2006/main" marL="0" lvl="0" indent="0" algn="l" rtl="0">
+            <a:pPr marL="0" lvl="0" indent="0" algn="l" rtl="0">
               <a:lnSpc>
                 <a:spcPct val="130000"/>
               </a:lnSpc>
@@ -10941,7 +10763,7 @@
               <a:buSzPts val="2000"/>
               <a:buNone/>
             </a:pPr>
-            <a:r xmlns:a="http://schemas.openxmlformats.org/drawingml/2006/main">
+            <a:r>
               <a:rPr lang="es" b="1" noProof="0" dirty="0">
                 <a:latin typeface="Avenir"/>
                 <a:ea typeface="Avenir"/>
@@ -10950,7 +10772,7 @@
               </a:rPr>
               <a:t>Fórmulas </a:t>
             </a:r>
-            <a:r xmlns:a="http://schemas.openxmlformats.org/drawingml/2006/main">
+            <a:r>
               <a:rPr lang="es" b="1" noProof="0" dirty="0" err="1">
                 <a:latin typeface="Avenir"/>
                 <a:ea typeface="Avenir"/>
@@ -10959,7 +10781,7 @@
               </a:rPr>
               <a:t>algebraicas</a:t>
             </a:r>
-            <a:endParaRPr xmlns:a="http://schemas.openxmlformats.org/drawingml/2006/main" lang="ca-ES" noProof="0" dirty="0"/>
+            <a:endParaRPr lang="ca-ES" noProof="0" dirty="0"/>
           </a:p>
         </p:txBody>
       </p:sp>
@@ -10998,7 +10820,7 @@
           </a:bodyPr>
           <a:lstStyle/>
           <a:p>
-            <a:pPr xmlns:a="http://schemas.openxmlformats.org/drawingml/2006/main" marL="0" lvl="0" indent="0" algn="l" rtl="0">
+            <a:pPr marL="0" lvl="0" indent="0" algn="l" rtl="0">
               <a:spcBef>
                 <a:spcPts val="0"/>
               </a:spcBef>
@@ -11007,7 +10829,7 @@
               </a:spcAft>
               <a:buNone/>
             </a:pPr>
-            <a:r xmlns:a="http://schemas.openxmlformats.org/drawingml/2006/main">
+            <a:r>
               <a:rPr lang="es" sz="1600" noProof="0" dirty="0">
                 <a:latin typeface="Avenir"/>
                 <a:ea typeface="Avenir"/>
@@ -11078,7 +10900,7 @@
                     <a:bodyPr/>
                     <a:lstStyle/>
                     <a:p>
-                      <a:r xmlns:a="http://schemas.openxmlformats.org/drawingml/2006/main">
+                      <a:r>
                         <a:rPr lang="es" b="0" noProof="0" dirty="0">
                           <a:solidFill>
                             <a:srgbClr val="150343"/>
@@ -11087,7 +10909,7 @@
                         </a:rPr>
                         <a:t>Nombre del grupo de candados (o </a:t>
                       </a:r>
-                      <a:r xmlns:a="http://schemas.openxmlformats.org/drawingml/2006/main">
+                      <a:r>
                         <a:rPr lang="es" b="1" noProof="0" dirty="0">
                           <a:solidFill>
                             <a:srgbClr val="150343"/>
@@ -11096,7 +10918,7 @@
                         </a:rPr>
                         <a:t>modelo </a:t>
                       </a:r>
-                      <a:r xmlns:a="http://schemas.openxmlformats.org/drawingml/2006/main">
+                      <a:r>
                         <a:rPr lang="es" b="0" noProof="0" dirty="0">
                           <a:solidFill>
                             <a:srgbClr val="150343"/>
@@ -11127,7 +10949,7 @@
                     <a:bodyPr/>
                     <a:lstStyle/>
                     <a:p>
-                      <a:r xmlns:a="http://schemas.openxmlformats.org/drawingml/2006/main">
+                      <a:r>
                         <a:rPr lang="es" b="1" noProof="0" dirty="0">
                           <a:solidFill>
                             <a:srgbClr val="150343"/>
@@ -11136,7 +10958,7 @@
                         </a:rPr>
                         <a:t>Descripción </a:t>
                       </a:r>
-                      <a:r xmlns:a="http://schemas.openxmlformats.org/drawingml/2006/main">
+                      <a:r>
                         <a:rPr lang="es" b="0" noProof="0" dirty="0">
                           <a:solidFill>
                             <a:srgbClr val="150343"/>
@@ -11167,7 +10989,7 @@
                     <a:bodyPr/>
                     <a:lstStyle/>
                     <a:p>
-                      <a:r xmlns:a="http://schemas.openxmlformats.org/drawingml/2006/main">
+                      <a:r>
                         <a:rPr lang="es" b="0" noProof="0" dirty="0">
                           <a:solidFill>
                             <a:srgbClr val="150343"/>
@@ -11176,7 +10998,7 @@
                         </a:rPr>
                         <a:t>Propuesta de </a:t>
                       </a:r>
-                      <a:r xmlns:a="http://schemas.openxmlformats.org/drawingml/2006/main">
+                      <a:r>
                         <a:rPr lang="es" b="1" noProof="0" dirty="0">
                           <a:solidFill>
                             <a:srgbClr val="150343"/>
@@ -11185,7 +11007,7 @@
                         </a:rPr>
                         <a:t>fórmula </a:t>
                       </a:r>
-                      <a:r xmlns:a="http://schemas.openxmlformats.org/drawingml/2006/main">
+                      <a:r>
                         <a:rPr lang="es" b="0" noProof="0" dirty="0">
                           <a:solidFill>
                             <a:srgbClr val="150343"/>
@@ -11861,7 +11683,7 @@
                     <a:bodyPr/>
                     <a:lstStyle/>
                     <a:p>
-                      <a:pPr xmlns:a="http://schemas.openxmlformats.org/drawingml/2006/main" marL="0" marR="0" lvl="0" indent="0" algn="l" defTabSz="914400" rtl="0" eaLnBrk="1" fontAlgn="auto" latinLnBrk="0" hangingPunct="1">
+                      <a:pPr marL="0" marR="0" lvl="0" indent="0" algn="l" defTabSz="914400" rtl="0" eaLnBrk="1" fontAlgn="auto" latinLnBrk="0" hangingPunct="1">
                         <a:lnSpc>
                           <a:spcPct val="100000"/>
                         </a:lnSpc>
@@ -11880,7 +11702,7 @@
                         <a:tabLst/>
                         <a:defRPr/>
                       </a:pPr>
-                      <a:r xmlns:a="http://schemas.openxmlformats.org/drawingml/2006/main">
+                      <a:r>
                         <a:rPr lang="es" noProof="0" dirty="0">
                           <a:solidFill>
                             <a:srgbClr val="150343"/>
@@ -11891,7 +11713,7 @@
                       </a:r>
                     </a:p>
                     <a:p>
-                      <a:pPr xmlns:a="http://schemas.openxmlformats.org/drawingml/2006/main" marL="0" marR="0" lvl="0" indent="0" algn="l" defTabSz="914400" rtl="0" eaLnBrk="1" fontAlgn="auto" latinLnBrk="0" hangingPunct="1">
+                      <a:pPr marL="0" marR="0" lvl="0" indent="0" algn="l" defTabSz="914400" rtl="0" eaLnBrk="1" fontAlgn="auto" latinLnBrk="0" hangingPunct="1">
                         <a:lnSpc>
                           <a:spcPct val="100000"/>
                         </a:lnSpc>
@@ -11910,13 +11732,13 @@
                         <a:tabLst/>
                         <a:defRPr/>
                       </a:pPr>
-                      <a:r xmlns:a="http://schemas.openxmlformats.org/drawingml/2006/main">
+                      <a:r>
                         <a:rPr lang="es" b="0" noProof="0" dirty="0">
                           <a:latin typeface="Avenir"/>
                         </a:rPr>
                         <a:t>Defina las letras y qué representan</a:t>
                       </a:r>
-                      <a:endParaRPr xmlns:a="http://schemas.openxmlformats.org/drawingml/2006/main" lang="ca-ES" b="0" noProof="0" dirty="0"/>
+                      <a:endParaRPr lang="ca-ES" b="0" noProof="0" dirty="0"/>
                     </a:p>
                   </a:txBody>
                   <a:tcPr anchor="ctr">
